--- a/curso/pptx/S43.pptx
+++ b/curso/pptx/S43.pptx
@@ -6819,7 +6819,7 @@
                 </a:solidFill>
                 <a:latin typeface="Nunito Sans"/>
               </a:rPr>
-              <a:t>Cognitivo:</a:t>
+              <a:t>认知的：</a:t>
             </a:r>
             <a:r>
               <a:rPr sz="2800" b="0">
@@ -6828,7 +6828,7 @@
                 </a:solidFill>
                 <a:latin typeface="Nunito Sans"/>
               </a:rPr>
-              <a:t> que tiene que ver con pensar y conocer</a:t>
+              <a:t>和思考与认识有关的</a:t>
             </a:r>
           </a:p>
           <a:p>
@@ -6853,7 +6853,7 @@
                 </a:solidFill>
                 <a:latin typeface="Nunito Sans"/>
               </a:rPr>
-              <a:t>Sesgo:</a:t>
+              <a:t>偏见：</a:t>
             </a:r>
             <a:r>
               <a:rPr sz="2800" b="0">
@@ -6862,7 +6862,7 @@
                 </a:solidFill>
                 <a:latin typeface="Nunito Sans"/>
               </a:rPr>
-              <a:t> inclinación hacia un lado (como la muestra sesgada)</a:t>
+              <a:t>偏向某一边（就像有偏的样本）</a:t>
             </a:r>
           </a:p>
           <a:p>
@@ -6887,7 +6887,7 @@
                 </a:solidFill>
                 <a:latin typeface="Nunito Sans"/>
               </a:rPr>
-              <a:t>Atajo mental:</a:t>
+              <a:t>思维捷径：</a:t>
             </a:r>
             <a:r>
               <a:rPr sz="2800" b="0">
@@ -6896,7 +6896,7 @@
                 </a:solidFill>
                 <a:latin typeface="Nunito Sans"/>
               </a:rPr>
-              <a:t> una forma rápida de decidir sin pensar mucho</a:t>
+              <a:t>不多想就快速做决定的方式</a:t>
             </a:r>
           </a:p>
           <a:p>
@@ -6921,7 +6921,7 @@
                 </a:solidFill>
                 <a:latin typeface="Nunito Sans"/>
               </a:rPr>
-              <a:t>Nos pasa a todos, también a los expertos</a:t>
+              <a:t>我们每个人都会这样，专家也一样</a:t>
             </a:r>
           </a:p>
         </p:txBody>
@@ -7155,7 +7155,7 @@
                 </a:solidFill>
                 <a:latin typeface="Nunito Sans"/>
               </a:rPr>
-              <a:t>El fallo está en el </a:t>
+              <a:t>错在</a:t>
             </a:r>
             <a:r>
               <a:rPr sz="2600" b="1">
@@ -7164,7 +7164,16 @@
                 </a:solidFill>
                 <a:latin typeface="Nunito Sans"/>
               </a:rPr>
-              <a:t>argumento</a:t>
+              <a:t>论证</a:t>
+            </a:r>
+            <a:r>
+              <a:rPr sz="2600" b="0">
+                <a:solidFill>
+                  <a:srgbClr val="1F2A44"/>
+                </a:solidFill>
+                <a:latin typeface="Nunito Sans"/>
+              </a:rPr>
+              <a:t>里</a:t>
             </a:r>
           </a:p>
           <a:p>
@@ -7189,7 +7198,7 @@
                 </a:solidFill>
                 <a:latin typeface="Nunito Sans"/>
               </a:rPr>
-              <a:t>Se ve en lo que alguien dice o escribe</a:t>
+              <a:t>从一个人说的或写的话里就能看出来</a:t>
             </a:r>
           </a:p>
           <a:p>
@@ -7214,7 +7223,7 @@
                 </a:solidFill>
                 <a:latin typeface="Nunito Sans"/>
               </a:rPr>
-              <a:t>Ejemplo: atacar a la persona en vez de a su idea</a:t>
+              <a:t>例子：攻击这个人，而不是他的想法</a:t>
             </a:r>
           </a:p>
         </p:txBody>
@@ -7344,7 +7353,7 @@
                 </a:solidFill>
                 <a:latin typeface="Nunito Sans"/>
               </a:rPr>
-              <a:t>El atajo que falla está en mi </a:t>
+              <a:t>出错的捷径在我的</a:t>
             </a:r>
             <a:r>
               <a:rPr sz="2600" b="1">
@@ -7353,7 +7362,16 @@
                 </a:solidFill>
                 <a:latin typeface="Nunito Sans"/>
               </a:rPr>
-              <a:t>cabeza</a:t>
+              <a:t>脑子</a:t>
+            </a:r>
+            <a:r>
+              <a:rPr sz="2600" b="0">
+                <a:solidFill>
+                  <a:srgbClr val="1F2A44"/>
+                </a:solidFill>
+                <a:latin typeface="Nunito Sans"/>
+              </a:rPr>
+              <a:t>里</a:t>
             </a:r>
           </a:p>
           <a:p>
@@ -7378,7 +7396,7 @@
                 </a:solidFill>
                 <a:latin typeface="Nunito Sans"/>
               </a:rPr>
-              <a:t>Me pasa aunque nadie me quiera engañar</a:t>
+              <a:t>即使没有人想骗我，它也会发生在我身上</a:t>
             </a:r>
           </a:p>
           <a:p>
@@ -7403,7 +7421,7 @@
                 </a:solidFill>
                 <a:latin typeface="Nunito Sans"/>
               </a:rPr>
-              <a:t>Ejemplo: decir rápido que la pelota cuesta 10 céntimos</a:t>
+              <a:t>例子：很快就说球的价钱是10分</a:t>
             </a:r>
           </a:p>
         </p:txBody>
@@ -7958,7 +7976,7 @@
                 </a:solidFill>
                 <a:latin typeface="Nunito Sans"/>
               </a:rPr>
-              <a:t>Cada día tomamos muchísimas decisiones</a:t>
+              <a:t>我们每天要做非常多的决定</a:t>
             </a:r>
           </a:p>
           <a:p>
@@ -7983,7 +8001,7 @@
                 </a:solidFill>
                 <a:latin typeface="Nunito Sans"/>
               </a:rPr>
-              <a:t>Pensarlo todo despacio sería agotador</a:t>
+              <a:t>所有事都慢慢想会让人精疲力尽</a:t>
             </a:r>
           </a:p>
           <a:p>
@@ -8008,7 +8026,7 @@
                 </a:solidFill>
                 <a:latin typeface="Nunito Sans"/>
               </a:rPr>
-              <a:t>Casi siempre los atajos aciertan: son útiles</a:t>
+              <a:t>大多数时候捷径是对的：它们很有用</a:t>
             </a:r>
           </a:p>
           <a:p>
@@ -8033,7 +8051,7 @@
                 </a:solidFill>
                 <a:latin typeface="Nunito Sans"/>
               </a:rPr>
-              <a:t>Pero en ciertas situaciones fallan </a:t>
+              <a:t>但在某些情况下，它们</a:t>
             </a:r>
             <a:r>
               <a:rPr sz="2800" b="1">
@@ -8042,7 +8060,7 @@
                 </a:solidFill>
                 <a:latin typeface="Nunito Sans"/>
               </a:rPr>
-              <a:t>siempre hacia el mismo lado</a:t>
+              <a:t>总是偏向同一边</a:t>
             </a:r>
             <a:r>
               <a:rPr sz="2800" b="0">
@@ -8051,7 +8069,7 @@
                 </a:solidFill>
                 <a:latin typeface="Nunito Sans"/>
               </a:rPr>
-              <a:t>: eso es un sesgo</a:t>
+              <a:t>地出错：这就是偏见</a:t>
             </a:r>
           </a:p>
         </p:txBody>

--- a/curso/pptx/S43.pptx
+++ b/curso/pptx/S43.pptx
@@ -4541,7 +4541,7 @@
                 </a:solidFill>
                 <a:latin typeface="Nunito Sans"/>
               </a:rPr>
-              <a:t>Chen在海里游泳时害怕鲨鱼。可是他一边看手机一边过马路，却毫不担心。</a:t>
+              <a:t>一个男孩在海里游泳时害怕鲨鱼。可是他一边看手机一边过马路，却毫不担心。</a:t>
             </a:r>
           </a:p>
         </p:txBody>
@@ -4868,7 +4868,7 @@
                 </a:solidFill>
                 <a:latin typeface="Nunito Sans"/>
               </a:rPr>
-              <a:t>Omar看到毕尔巴鄂上空有乌云，就拿了雨伞。他没有在手机上查天气，也没有慢慢想。</a:t>
+              <a:t>一个男孩看到毕尔巴鄂上空有乌云，就拿了雨伞。他没有在手机上查天气，也没有慢慢想。</a:t>
             </a:r>
           </a:p>
         </p:txBody>
